--- a/Development_D2/Guided_Practice/D2-L10_Practice_Room_Describing_People_and_Style.pptx
+++ b/Development_D2/Guided_Practice/D2-L10_Practice_Room_Describing_People_and_Style.pptx
@@ -14605,11 +14605,11 @@
           <a:bodyPr wrap="square" lIns="0" tIns="0" rIns="0" bIns="0" rtlCol="0" anchor="ctr"/>
           <a:lstStyle/>
           <a:p>
-            <a:pPr algn="l" indent="0" marL="0">
-              <a:buNone/>
-            </a:pPr>
-            <a:r>
-              <a:rPr lang="ar-SA" altLang="en-US" sz="2000" b="1" dirty="0">
+            <a:pPr rtl="1" algn="r" indent="0" marL="0">
+              <a:buNone/>
+            </a:pPr>
+            <a:r>
+              <a:rPr lang="ar-SA" altLang="en-US" sz="1450" b="1" dirty="0">
                 <a:solidFill>
                   <a:srgbClr val="1B3B6F"/>
                 </a:solidFill>
@@ -14617,373 +14617,9 @@
                 <a:ea typeface="Amiri" pitchFamily="2" charset="-78"/>
                 <a:cs typeface="Amiri" pitchFamily="2" charset="-78"/>
               </a:rPr>
-              <a:t>طَوِيلُ / طَوِيلَةُ القَامَةِ</a:t>
-            </a:r>
-            <a:pPr algn="l" indent="0" marL="0">
-              <a:buNone/>
-            </a:pPr>
-            <a:r>
-              <a:rPr lang="en-US" sz="1550" b="1" dirty="0">
-                <a:solidFill>
-                  <a:srgbClr val="1B3B6F"/>
-                </a:solidFill>
-                <a:latin typeface="Calibri" pitchFamily="34" charset="0"/>
-                <a:cs typeface="Amiri" pitchFamily="2" charset="-78"/>
-              </a:rPr>
-              <a:t>  ·  </a:t>
-            </a:r>
-            <a:pPr algn="l" indent="0" marL="0">
-              <a:buNone/>
-            </a:pPr>
-            <a:r>
-              <a:rPr lang="ar-SA" altLang="en-US" sz="2000" b="1" dirty="0">
-                <a:solidFill>
-                  <a:srgbClr val="1B3B6F"/>
-                </a:solidFill>
-                <a:latin typeface="Amiri" pitchFamily="2" charset="-78"/>
-                <a:ea typeface="Amiri" pitchFamily="2" charset="-78"/>
-                <a:cs typeface="Amiri" pitchFamily="2" charset="-78"/>
-              </a:rPr>
-              <a:t>شَعْرٌ قَصِيرٌ</a:t>
-            </a:r>
-            <a:pPr algn="l" indent="0" marL="0">
-              <a:buNone/>
-            </a:pPr>
-            <a:r>
-              <a:rPr lang="en-US" sz="1550" b="1" dirty="0">
-                <a:solidFill>
-                  <a:srgbClr val="1B3B6F"/>
-                </a:solidFill>
-                <a:latin typeface="Calibri" pitchFamily="34" charset="0"/>
-                <a:cs typeface="Amiri" pitchFamily="2" charset="-78"/>
-              </a:rPr>
-              <a:t> · </a:t>
-            </a:r>
-            <a:pPr algn="l" indent="0" marL="0">
-              <a:buNone/>
-            </a:pPr>
-            <a:r>
-              <a:rPr lang="ar-SA" altLang="en-US" sz="2000" b="1" dirty="0">
-                <a:solidFill>
-                  <a:srgbClr val="1B3B6F"/>
-                </a:solidFill>
-                <a:latin typeface="Amiri" pitchFamily="2" charset="-78"/>
-                <a:ea typeface="Amiri" pitchFamily="2" charset="-78"/>
-                <a:cs typeface="Amiri" pitchFamily="2" charset="-78"/>
-              </a:rPr>
-              <a:t>مُجَعَّدٌ</a:t>
-            </a:r>
-            <a:pPr algn="l" indent="0" marL="0">
-              <a:buNone/>
-            </a:pPr>
-            <a:r>
-              <a:rPr lang="en-US" sz="1550" b="1" dirty="0">
-                <a:solidFill>
-                  <a:srgbClr val="1B3B6F"/>
-                </a:solidFill>
-                <a:latin typeface="Calibri" pitchFamily="34" charset="0"/>
-                <a:cs typeface="Amiri" pitchFamily="2" charset="-78"/>
-              </a:rPr>
-              <a:t>  ·  </a:t>
-            </a:r>
-            <a:pPr algn="l" indent="0" marL="0">
-              <a:buNone/>
-            </a:pPr>
-            <a:r>
-              <a:rPr lang="ar-SA" altLang="en-US" sz="2000" b="1" dirty="0">
-                <a:solidFill>
-                  <a:srgbClr val="1B3B6F"/>
-                </a:solidFill>
-                <a:latin typeface="Amiri" pitchFamily="2" charset="-78"/>
-                <a:ea typeface="Amiri" pitchFamily="2" charset="-78"/>
-                <a:cs typeface="Amiri" pitchFamily="2" charset="-78"/>
-              </a:rPr>
-              <a:t>عَيْنَانِ بُنِّيَّتَانِ</a:t>
-            </a:r>
-            <a:pPr algn="l" indent="0" marL="0">
-              <a:buNone/>
-            </a:pPr>
-            <a:r>
-              <a:rPr lang="en-US" sz="1550" b="1" dirty="0">
-                <a:solidFill>
-                  <a:srgbClr val="1B3B6F"/>
-                </a:solidFill>
-                <a:latin typeface="Calibri" pitchFamily="34" charset="0"/>
-                <a:cs typeface="Amiri" pitchFamily="2" charset="-78"/>
-              </a:rPr>
-              <a:t>  ·  </a:t>
-            </a:r>
-            <a:pPr algn="l" indent="0" marL="0">
-              <a:buNone/>
-            </a:pPr>
-            <a:r>
-              <a:rPr lang="ar-SA" altLang="en-US" sz="2000" b="1" dirty="0">
-                <a:solidFill>
-                  <a:srgbClr val="1B3B6F"/>
-                </a:solidFill>
-                <a:latin typeface="Amiri" pitchFamily="2" charset="-78"/>
-                <a:ea typeface="Amiri" pitchFamily="2" charset="-78"/>
-                <a:cs typeface="Amiri" pitchFamily="2" charset="-78"/>
-              </a:rPr>
-              <a:t>يَرْتَدِي نَظَّارَةً</a:t>
-            </a:r>
-            <a:pPr algn="l" indent="0" marL="0">
-              <a:buNone/>
-            </a:pPr>
-            <a:r>
-              <a:rPr lang="en-US" sz="1550" b="1" dirty="0">
-                <a:solidFill>
-                  <a:srgbClr val="1B3B6F"/>
-                </a:solidFill>
-                <a:latin typeface="Calibri" pitchFamily="34" charset="0"/>
-                <a:cs typeface="Amiri" pitchFamily="2" charset="-78"/>
-              </a:rPr>
-              <a:t>  ·  </a:t>
-            </a:r>
-            <a:pPr algn="l" indent="0" marL="0">
-              <a:buNone/>
-            </a:pPr>
-            <a:r>
-              <a:rPr lang="ar-SA" altLang="en-US" sz="2000" b="1" dirty="0">
-                <a:solidFill>
-                  <a:srgbClr val="1B3B6F"/>
-                </a:solidFill>
-                <a:latin typeface="Amiri" pitchFamily="2" charset="-78"/>
-                <a:ea typeface="Amiri" pitchFamily="2" charset="-78"/>
-                <a:cs typeface="Amiri" pitchFamily="2" charset="-78"/>
-              </a:rPr>
-              <a:t>وَدُودٌ</a:t>
-            </a:r>
-            <a:pPr algn="l" indent="0" marL="0">
-              <a:buNone/>
-            </a:pPr>
-            <a:r>
-              <a:rPr lang="en-US" sz="1550" b="1" dirty="0">
-                <a:solidFill>
-                  <a:srgbClr val="1B3B6F"/>
-                </a:solidFill>
-                <a:latin typeface="Calibri" pitchFamily="34" charset="0"/>
-                <a:cs typeface="Amiri" pitchFamily="2" charset="-78"/>
-              </a:rPr>
-              <a:t> · </a:t>
-            </a:r>
-            <a:pPr algn="l" indent="0" marL="0">
-              <a:buNone/>
-            </a:pPr>
-            <a:r>
-              <a:rPr lang="ar-SA" altLang="en-US" sz="2000" b="1" dirty="0">
-                <a:solidFill>
-                  <a:srgbClr val="1B3B6F"/>
-                </a:solidFill>
-                <a:latin typeface="Amiri" pitchFamily="2" charset="-78"/>
-                <a:ea typeface="Amiri" pitchFamily="2" charset="-78"/>
-                <a:cs typeface="Amiri" pitchFamily="2" charset="-78"/>
-              </a:rPr>
-              <a:t>صَبُورٌ</a:t>
-            </a:r>
-            <a:pPr algn="l" indent="0" marL="0">
-              <a:buNone/>
-            </a:pPr>
-            <a:r>
-              <a:rPr lang="en-US" sz="1550" b="1" dirty="0">
-                <a:solidFill>
-                  <a:srgbClr val="1B3B6F"/>
-                </a:solidFill>
-                <a:latin typeface="Calibri" pitchFamily="34" charset="0"/>
-                <a:cs typeface="Amiri" pitchFamily="2" charset="-78"/>
-              </a:rPr>
-              <a:t> · </a:t>
-            </a:r>
-            <a:pPr algn="l" indent="0" marL="0">
-              <a:buNone/>
-            </a:pPr>
-            <a:r>
-              <a:rPr lang="ar-SA" altLang="en-US" sz="2000" b="1" dirty="0">
-                <a:solidFill>
-                  <a:srgbClr val="1B3B6F"/>
-                </a:solidFill>
-                <a:latin typeface="Amiri" pitchFamily="2" charset="-78"/>
-                <a:ea typeface="Amiri" pitchFamily="2" charset="-78"/>
-                <a:cs typeface="Amiri" pitchFamily="2" charset="-78"/>
-              </a:rPr>
-              <a:t>صَادِقٌ</a:t>
-            </a:r>
-            <a:pPr algn="l" indent="0" marL="0">
-              <a:buNone/>
-            </a:pPr>
-            <a:r>
-              <a:rPr lang="en-US" sz="1550" b="1" dirty="0">
-                <a:solidFill>
-                  <a:srgbClr val="1B3B6F"/>
-                </a:solidFill>
-                <a:latin typeface="Calibri" pitchFamily="34" charset="0"/>
-                <a:cs typeface="Amiri" pitchFamily="2" charset="-78"/>
-              </a:rPr>
-              <a:t>  ·  </a:t>
-            </a:r>
-            <a:pPr algn="l" indent="0" marL="0">
-              <a:buNone/>
-            </a:pPr>
-            <a:r>
-              <a:rPr lang="ar-SA" altLang="en-US" sz="2000" b="1" dirty="0">
-                <a:solidFill>
-                  <a:srgbClr val="1B3B6F"/>
-                </a:solidFill>
-                <a:latin typeface="Amiri" pitchFamily="2" charset="-78"/>
-                <a:ea typeface="Amiri" pitchFamily="2" charset="-78"/>
-                <a:cs typeface="Amiri" pitchFamily="2" charset="-78"/>
-              </a:rPr>
-              <a:t>أَحْتَرِمُهُ</a:t>
-            </a:r>
-            <a:pPr algn="l" indent="0" marL="0">
-              <a:buNone/>
-            </a:pPr>
-            <a:r>
-              <a:rPr lang="en-US" sz="1550" b="1" dirty="0">
-                <a:solidFill>
-                  <a:srgbClr val="1B3B6F"/>
-                </a:solidFill>
-                <a:latin typeface="Calibri" pitchFamily="34" charset="0"/>
-                <a:cs typeface="Amiri" pitchFamily="2" charset="-78"/>
-              </a:rPr>
-              <a:t> · </a:t>
-            </a:r>
-            <a:pPr algn="l" indent="0" marL="0">
-              <a:buNone/>
-            </a:pPr>
-            <a:r>
-              <a:rPr lang="ar-SA" altLang="en-US" sz="2000" b="1" dirty="0">
-                <a:solidFill>
-                  <a:srgbClr val="1B3B6F"/>
-                </a:solidFill>
-                <a:latin typeface="Amiri" pitchFamily="2" charset="-78"/>
-                <a:ea typeface="Amiri" pitchFamily="2" charset="-78"/>
-                <a:cs typeface="Amiri" pitchFamily="2" charset="-78"/>
-              </a:rPr>
-              <a:t>أَحْتَرِمُهَا</a:t>
-            </a:r>
-            <a:pPr algn="l" indent="0" marL="0">
-              <a:buNone/>
-            </a:pPr>
-            <a:r>
-              <a:rPr lang="en-US" sz="1550" b="1" dirty="0">
-                <a:solidFill>
-                  <a:srgbClr val="1B3B6F"/>
-                </a:solidFill>
-                <a:latin typeface="Calibri" pitchFamily="34" charset="0"/>
-                <a:cs typeface="Amiri" pitchFamily="2" charset="-78"/>
-              </a:rPr>
-              <a:t>  ·  </a:t>
-            </a:r>
-            <a:pPr algn="l" indent="0" marL="0">
-              <a:buNone/>
-            </a:pPr>
-            <a:r>
-              <a:rPr lang="ar-SA" altLang="en-US" sz="2000" b="1" dirty="0">
-                <a:solidFill>
-                  <a:srgbClr val="1B3B6F"/>
-                </a:solidFill>
-                <a:latin typeface="Amiri" pitchFamily="2" charset="-78"/>
-                <a:ea typeface="Amiri" pitchFamily="2" charset="-78"/>
-                <a:cs typeface="Amiri" pitchFamily="2" charset="-78"/>
-              </a:rPr>
-              <a:t>أَوَّلًا</a:t>
-            </a:r>
-            <a:pPr algn="l" indent="0" marL="0">
-              <a:buNone/>
-            </a:pPr>
-            <a:r>
-              <a:rPr lang="en-US" sz="1550" b="1" dirty="0">
-                <a:solidFill>
-                  <a:srgbClr val="1B3B6F"/>
-                </a:solidFill>
-                <a:latin typeface="Calibri" pitchFamily="34" charset="0"/>
-                <a:cs typeface="Amiri" pitchFamily="2" charset="-78"/>
-              </a:rPr>
-              <a:t> · </a:t>
-            </a:r>
-            <a:pPr algn="l" indent="0" marL="0">
-              <a:buNone/>
-            </a:pPr>
-            <a:r>
-              <a:rPr lang="ar-SA" altLang="en-US" sz="2000" b="1" dirty="0">
-                <a:solidFill>
-                  <a:srgbClr val="1B3B6F"/>
-                </a:solidFill>
-                <a:latin typeface="Amiri" pitchFamily="2" charset="-78"/>
-                <a:ea typeface="Amiri" pitchFamily="2" charset="-78"/>
-                <a:cs typeface="Amiri" pitchFamily="2" charset="-78"/>
-              </a:rPr>
-              <a:t>بَعْدَ ذٰلِكَ</a:t>
-            </a:r>
-            <a:pPr algn="l" indent="0" marL="0">
-              <a:buNone/>
-            </a:pPr>
-            <a:r>
-              <a:rPr lang="en-US" sz="1550" b="1" dirty="0">
-                <a:solidFill>
-                  <a:srgbClr val="1B3B6F"/>
-                </a:solidFill>
-                <a:latin typeface="Calibri" pitchFamily="34" charset="0"/>
-                <a:cs typeface="Amiri" pitchFamily="2" charset="-78"/>
-              </a:rPr>
-              <a:t> · </a:t>
-            </a:r>
-            <a:pPr algn="l" indent="0" marL="0">
-              <a:buNone/>
-            </a:pPr>
-            <a:r>
-              <a:rPr lang="ar-SA" altLang="en-US" sz="2000" b="1" dirty="0">
-                <a:solidFill>
-                  <a:srgbClr val="1B3B6F"/>
-                </a:solidFill>
-                <a:latin typeface="Amiri" pitchFamily="2" charset="-78"/>
-                <a:ea typeface="Amiri" pitchFamily="2" charset="-78"/>
-                <a:cs typeface="Amiri" pitchFamily="2" charset="-78"/>
-              </a:rPr>
-              <a:t>أَخِيرًا</a:t>
-            </a:r>
-            <a:pPr algn="l" indent="0" marL="0">
-              <a:buNone/>
-            </a:pPr>
-            <a:r>
-              <a:rPr lang="en-US" sz="1550" b="1" dirty="0">
-                <a:solidFill>
-                  <a:srgbClr val="1B3B6F"/>
-                </a:solidFill>
-                <a:latin typeface="Calibri" pitchFamily="34" charset="0"/>
-                <a:cs typeface="Amiri" pitchFamily="2" charset="-78"/>
-              </a:rPr>
-              <a:t>  ·  </a:t>
-            </a:r>
-            <a:pPr algn="l" indent="0" marL="0">
-              <a:buNone/>
-            </a:pPr>
-            <a:r>
-              <a:rPr lang="ar-SA" altLang="en-US" sz="2000" b="1" dirty="0">
-                <a:solidFill>
-                  <a:srgbClr val="1B3B6F"/>
-                </a:solidFill>
-                <a:latin typeface="Amiri" pitchFamily="2" charset="-78"/>
-                <a:ea typeface="Amiri" pitchFamily="2" charset="-78"/>
-                <a:cs typeface="Amiri" pitchFamily="2" charset="-78"/>
-              </a:rPr>
-              <a:t>أَفْضَلُ</a:t>
-            </a:r>
-            <a:pPr algn="l" indent="0" marL="0">
-              <a:buNone/>
-            </a:pPr>
-            <a:r>
-              <a:rPr lang="en-US" sz="1550" b="1" dirty="0">
-                <a:solidFill>
-                  <a:srgbClr val="1B3B6F"/>
-                </a:solidFill>
-                <a:latin typeface="Calibri" pitchFamily="34" charset="0"/>
-                <a:cs typeface="Amiri" pitchFamily="2" charset="-78"/>
-              </a:rPr>
-              <a:t> + noun</a:t>
-            </a:r>
-            <a:endParaRPr lang="en-US" sz="1550" dirty="0"/>
+              <a:t>طَوِيلُ / طَوِيلَةُ القَامَةِ  ·  شَعْرٌ قَصِيرٌ · مُجَعَّدٌ  ·  عَيْنَانِ بُنِّيَّتَانِ  ·  يَرْتَدِي نَظَّارَةً  ·  وَدُودٌ · صَبُورٌ · صَادِقٌ  ·  أَحْتَرِمُهُ · أَحْتَرِمُهَا  ·  أَوَّلًا · بَعْدَ ذٰلِكَ · أَخِيرًا  ·  أَفْضَلُ مُعَلِّمَةٍ</a:t>
+            </a:r>
+            <a:endParaRPr lang="ar-SA" sz="1450" dirty="0"/>
           </a:p>
         </p:txBody>
       </p:sp>
